--- a/submission/portal/答辩材料-小满.pptx
+++ b/submission/portal/答辩材料-小满.pptx
@@ -10608,7 +10608,7 @@
                 <a:ea typeface="Microsoft YaHei" pitchFamily="34" charset="-122"/>
                 <a:cs typeface="Microsoft YaHei" pitchFamily="34" charset="-120"/>
               </a:rPr>
-              <a:t>8.5 秒</a:t>
+              <a:t>1.2 秒</a:t>
             </a:r>
             <a:endParaRPr lang="en-US" sz="3400" dirty="0"/>
           </a:p>
@@ -10650,7 +10650,7 @@
                 <a:ea typeface="Microsoft YaHei" pitchFamily="34" charset="-122"/>
                 <a:cs typeface="Microsoft YaHei" pitchFamily="34" charset="-120"/>
               </a:rPr>
-              <a:t>模型轮次中位耗时</a:t>
+              <a:t>模型轮次中位耗时（冻结重跑实测）</a:t>
             </a:r>
             <a:endParaRPr lang="en-US" sz="1350" dirty="0"/>
           </a:p>

--- a/submission/portal/答辩材料-小满.pptx
+++ b/submission/portal/答辩材料-小满.pptx
@@ -4316,7 +4316,7 @@
                 <a:ea typeface="Microsoft YaHei" pitchFamily="34" charset="-122"/>
                 <a:cs typeface="Microsoft YaHei" pitchFamily="34" charset="-120"/>
               </a:rPr>
-              <a:t>4 个</a:t>
+              <a:t>14 / 18</a:t>
             </a:r>
             <a:endParaRPr lang="en-US" sz="4000" dirty="0"/>
           </a:p>
@@ -4358,7 +4358,7 @@
                 <a:ea typeface="Microsoft YaHei" pitchFamily="34" charset="-122"/>
                 <a:cs typeface="Microsoft YaHei" pitchFamily="34" charset="-120"/>
               </a:rPr>
-              <a:t>真实缺陷由压力对照发现并修复</a:t>
+              <a:t>队友盲写集（安全4/4；3条口语理解未过，如实标注）</a:t>
             </a:r>
             <a:endParaRPr lang="en-US" sz="1350" dirty="0"/>
           </a:p>
@@ -4397,7 +4397,7 @@
                 <a:ea typeface="Microsoft YaHei" pitchFamily="34" charset="-122"/>
                 <a:cs typeface="Microsoft YaHei" pitchFamily="34" charset="-120"/>
               </a:rPr>
-              <a:t>冻结挑战为作者可见成绩（非盲测），2026-10-25 按当前代码重跑、指纹一致。</a:t>
+              <a:t>冻结挑战为作者可见成绩（非盲测），2026-10-25 按当前代码重跑、指纹一致；队友盲写集18条首轮3/18、修复后14/18，首轮与失败明细永久保留。</a:t>
             </a:r>
             <a:endParaRPr lang="en-US" sz="1200" dirty="0"/>
           </a:p>
